--- a/Causal_Inference_Course/Week04_Causal_Graphs_DAGs/Week04_Causal_Graphs_DAGs_Lecture.pptx
+++ b/Causal_Inference_Course/Week04_Causal_Graphs_DAGs/Week04_Causal_Graphs_DAGs_Lecture.pptx
@@ -20875,7 +20875,7 @@
                 </a:solidFill>
                 <a:latin typeface="Calibri"/>
               </a:rPr>
-              <a:t>Knowing it rained AND the sprinkler was the cause tells you the sprinkler was likely off.</a:t>
+              <a:t>Grass is wet (the collider): learning it rained makes the sprinkler less likely — one cause explains the effect away.</a:t>
             </a:r>
           </a:p>
           <a:p>
